--- a/paper/final_defense.pptx
+++ b/paper/final_defense.pptx
@@ -6273,7 +6273,7 @@
                 </a:solidFill>
                 <a:latin typeface="Calibri"/>
               </a:rPr>
-              <a:t>A Cost-Aware Hybrid NLP–LLM Microservice for Thread-Level Sentiment and Watchlist-Driven Target Stance over Code-Mixed Bangla Social Media, with an MCP-Backed Agentic RAG Insight Layer</a:t>
+              <a:t>Cost Aware Hybrid NLP LLM with Watchlist Driven Agentic RAG for Bangla Social Media Analysis</a:t>
             </a:r>
           </a:p>
         </p:txBody>
